--- a/shiny_app_documentation.pptx
+++ b/shiny_app_documentation.pptx
@@ -10545,10 +10545,15 @@
             <p:ph idx="1"/>
           </p:nvPr>
         </p:nvSpPr>
-        <p:spPr/>
+        <p:spPr>
+          <a:xfrm>
+            <a:off x="514351" y="1606551"/>
+            <a:ext cx="7921726" cy="3079748"/>
+          </a:xfrm>
+        </p:spPr>
         <p:txBody>
           <a:bodyPr>
-            <a:normAutofit fontScale="55000" lnSpcReduction="20000"/>
+            <a:normAutofit lnSpcReduction="10000"/>
           </a:bodyPr>
           <a:lstStyle/>
           <a:p>
@@ -10556,57 +10561,81 @@
               <a:buNone/>
             </a:pPr>
             <a:r>
-              <a:rPr b="1" dirty="0" err="1"/>
+              <a:rPr sz="1200" b="1" dirty="0" err="1">
+                <a:ea typeface="Microsoft YaHei" panose="020B0503020204020204" pitchFamily="34" charset="-122"/>
+              </a:rPr>
               <a:t>事件处理</a:t>
             </a:r>
             <a:r>
-              <a:rPr b="1" dirty="0"/>
+              <a:rPr sz="1200" b="1" dirty="0">
+                <a:ea typeface="Microsoft YaHei" panose="020B0503020204020204" pitchFamily="34" charset="-122"/>
+              </a:rPr>
               <a:t>：</a:t>
             </a:r>
           </a:p>
           <a:p>
             <a:pPr lvl="0"/>
             <a:r>
-              <a:rPr b="1" dirty="0" err="1"/>
+              <a:rPr sz="1200" b="1" dirty="0" err="1">
+                <a:ea typeface="Microsoft YaHei" panose="020B0503020204020204" pitchFamily="34" charset="-122"/>
+              </a:rPr>
               <a:t>核心事件</a:t>
             </a:r>
             <a:r>
-              <a:rPr dirty="0"/>
+              <a:rPr sz="1200" dirty="0">
+                <a:ea typeface="Microsoft YaHei" panose="020B0503020204020204" pitchFamily="34" charset="-122"/>
+              </a:rPr>
               <a:t>：</a:t>
             </a:r>
           </a:p>
           <a:p>
             <a:pPr lvl="1"/>
             <a:r>
-              <a:rPr dirty="0" err="1"/>
+              <a:rPr sz="1200" dirty="0" err="1">
+                <a:ea typeface="Microsoft YaHei" panose="020B0503020204020204" pitchFamily="34" charset="-122"/>
+              </a:rPr>
               <a:t>预测按钮点击事件</a:t>
             </a:r>
-            <a:endParaRPr dirty="0"/>
+            <a:endParaRPr sz="1200" dirty="0">
+              <a:ea typeface="Microsoft YaHei" panose="020B0503020204020204" pitchFamily="34" charset="-122"/>
+            </a:endParaRPr>
           </a:p>
           <a:p>
             <a:pPr lvl="1"/>
             <a:r>
-              <a:rPr dirty="0" err="1"/>
+              <a:rPr sz="1200" dirty="0" err="1">
+                <a:ea typeface="Microsoft YaHei" panose="020B0503020204020204" pitchFamily="34" charset="-122"/>
+              </a:rPr>
               <a:t>输入参数变化事件</a:t>
             </a:r>
-            <a:endParaRPr dirty="0"/>
+            <a:endParaRPr sz="1200" dirty="0">
+              <a:ea typeface="Microsoft YaHei" panose="020B0503020204020204" pitchFamily="34" charset="-122"/>
+            </a:endParaRPr>
           </a:p>
           <a:p>
             <a:pPr lvl="1"/>
             <a:r>
-              <a:rPr dirty="0" err="1"/>
+              <a:rPr sz="1200" dirty="0" err="1">
+                <a:ea typeface="Microsoft YaHei" panose="020B0503020204020204" pitchFamily="34" charset="-122"/>
+              </a:rPr>
               <a:t>应用初始化事件</a:t>
             </a:r>
-            <a:endParaRPr lang="en-CN" dirty="0"/>
-          </a:p>
-          <a:p>
-            <a:pPr lvl="0"/>
-            <a:r>
-              <a:rPr lang="zh-CN" altLang="en-US" b="1" dirty="0"/>
+            <a:endParaRPr lang="en-CN" sz="1200" dirty="0">
+              <a:ea typeface="Microsoft YaHei" panose="020B0503020204020204" pitchFamily="34" charset="-122"/>
+            </a:endParaRPr>
+          </a:p>
+          <a:p>
+            <a:pPr lvl="0"/>
+            <a:r>
+              <a:rPr lang="zh-CN" altLang="en-US" sz="1200" b="1" dirty="0">
+                <a:ea typeface="Microsoft YaHei" panose="020B0503020204020204" pitchFamily="34" charset="-122"/>
+              </a:rPr>
               <a:t>事件处理流程</a:t>
             </a:r>
             <a:r>
-              <a:rPr lang="zh-CN" altLang="en-US" dirty="0"/>
+              <a:rPr lang="zh-CN" altLang="en-US" sz="1200" dirty="0">
+                <a:ea typeface="Microsoft YaHei" panose="020B0503020204020204" pitchFamily="34" charset="-122"/>
+              </a:rPr>
               <a:t>：</a:t>
             </a:r>
           </a:p>
@@ -10615,7 +10644,9 @@
               <a:buAutoNum type="arabicPeriod"/>
             </a:pPr>
             <a:r>
-              <a:rPr lang="zh-CN" altLang="en-US" dirty="0"/>
+              <a:rPr lang="zh-CN" altLang="en-US" sz="1200" dirty="0">
+                <a:ea typeface="Microsoft YaHei" panose="020B0503020204020204" pitchFamily="34" charset="-122"/>
+              </a:rPr>
               <a:t>监听用户点击预测按钮</a:t>
             </a:r>
           </a:p>
@@ -10624,7 +10655,9 @@
               <a:buAutoNum type="arabicPeriod"/>
             </a:pPr>
             <a:r>
-              <a:rPr lang="zh-CN" altLang="en-US" dirty="0"/>
+              <a:rPr lang="zh-CN" altLang="en-US" sz="1200" dirty="0">
+                <a:ea typeface="Microsoft YaHei" panose="020B0503020204020204" pitchFamily="34" charset="-122"/>
+              </a:rPr>
               <a:t>收集所有输入参数</a:t>
             </a:r>
           </a:p>
@@ -10633,7 +10666,9 @@
               <a:buAutoNum type="arabicPeriod"/>
             </a:pPr>
             <a:r>
-              <a:rPr lang="zh-CN" altLang="en-US" dirty="0"/>
+              <a:rPr lang="zh-CN" altLang="en-US" sz="1200" dirty="0">
+                <a:ea typeface="Microsoft YaHei" panose="020B0503020204020204" pitchFamily="34" charset="-122"/>
+              </a:rPr>
               <a:t>构建特征向量</a:t>
             </a:r>
           </a:p>
@@ -10642,7 +10677,9 @@
               <a:buAutoNum type="arabicPeriod"/>
             </a:pPr>
             <a:r>
-              <a:rPr lang="zh-CN" altLang="en-US" dirty="0"/>
+              <a:rPr lang="zh-CN" altLang="en-US" sz="1200" dirty="0">
+                <a:ea typeface="Microsoft YaHei" panose="020B0503020204020204" pitchFamily="34" charset="-122"/>
+              </a:rPr>
               <a:t>执行预测和解释</a:t>
             </a:r>
           </a:p>
@@ -10651,15 +10688,21 @@
               <a:buAutoNum type="arabicPeriod"/>
             </a:pPr>
             <a:r>
-              <a:rPr lang="zh-CN" altLang="en-US" dirty="0"/>
+              <a:rPr lang="zh-CN" altLang="en-US" sz="1200" dirty="0">
+                <a:ea typeface="Microsoft YaHei" panose="020B0503020204020204" pitchFamily="34" charset="-122"/>
+              </a:rPr>
               <a:t>更新</a:t>
             </a:r>
             <a:r>
-              <a:rPr lang="en-US" dirty="0"/>
+              <a:rPr lang="en-US" sz="1200" dirty="0">
+                <a:ea typeface="Microsoft YaHei" panose="020B0503020204020204" pitchFamily="34" charset="-122"/>
+              </a:rPr>
               <a:t>UI</a:t>
             </a:r>
             <a:r>
-              <a:rPr lang="zh-CN" altLang="en-US" dirty="0"/>
+              <a:rPr lang="zh-CN" altLang="en-US" sz="1200" dirty="0">
+                <a:ea typeface="Microsoft YaHei" panose="020B0503020204020204" pitchFamily="34" charset="-122"/>
+              </a:rPr>
               <a:t>展示</a:t>
             </a:r>
           </a:p>
